--- a/Schools_ML_Track/camp_2026/slides/DA/DA12.pptx
+++ b/Schools_ML_Track/camp_2026/slides/DA/DA12.pptx
@@ -117,7 +117,7 @@
   <p:extLst>
     <p:ext uri="{521415D9-36F7-43E2-AB2F-B90AF26B5E84}">
       <p14:sectionLst xmlns:p14="http://schemas.microsoft.com/office/powerpoint/2010/main">
-        <p14:section name="Opening" id="{b940170c-9d35-5184-43e7-13ddae7a596c}">
+        <p14:section name="Opening" id="{7919debc-faff-20cc-c603-26a59e6ee33c}">
           <p14:sldIdLst>
             <p14:sldId id="256"/>
             <p14:sldId id="257"/>
@@ -128,7 +128,7 @@
             <p14:sldId id="262"/>
           </p14:sldIdLst>
         </p14:section>
-        <p14:section name="Make and close" id="{39b61dc5-d9b5-6997-77bb-a3c4b0477e75}">
+        <p14:section name="Make and close" id="{76301a4a-31c7-091b-6f8b-778abf860adc}">
           <p14:sldIdLst>
             <p14:sldId id="263"/>
             <p14:sldId id="264"/>

--- a/Schools_ML_Track/camp_2026/slides/DA/DA12.pptx
+++ b/Schools_ML_Track/camp_2026/slides/DA/DA12.pptx
@@ -117,7 +117,7 @@
   <p:extLst>
     <p:ext uri="{521415D9-36F7-43E2-AB2F-B90AF26B5E84}">
       <p14:sectionLst xmlns:p14="http://schemas.microsoft.com/office/powerpoint/2010/main">
-        <p14:section name="Opening" id="{7919debc-faff-20cc-c603-26a59e6ee33c}">
+        <p14:section name="Opening" id="{36d65b3a-2c05-1a12-d29b-f98330fec4cb}">
           <p14:sldIdLst>
             <p14:sldId id="256"/>
             <p14:sldId id="257"/>
@@ -128,7 +128,7 @@
             <p14:sldId id="262"/>
           </p14:sldIdLst>
         </p14:section>
-        <p14:section name="Make and close" id="{76301a4a-31c7-091b-6f8b-778abf860adc}">
+        <p14:section name="Make and close" id="{b3605e17-64c6-a1f3-5a1f-30d2125e8582}">
           <p14:sldIdLst>
             <p14:sldId id="263"/>
             <p14:sldId id="264"/>
@@ -2169,7 +2169,24 @@
                 <a:ea typeface="Lato" pitchFamily="34" charset="-122"/>
                 <a:cs typeface="Lato" pitchFamily="34" charset="-120"/>
               </a:rPr>
-              <a:t>Checkpoint one: load, summarise, chart and explain</a:t>
+              <a:t>Checkpoint one: load,</a:t>
+            </a:r>
+            <a:endParaRPr lang="en-US" sz="5600" dirty="0"/>
+          </a:p>
+          <a:p>
+            <a:pPr algn="l" indent="0" marL="0">
+              <a:buNone/>
+            </a:pPr>
+            <a:r>
+              <a:rPr lang="en-US" sz="5600" b="1" dirty="0">
+                <a:solidFill>
+                  <a:srgbClr val="FFFFFF"/>
+                </a:solidFill>
+                <a:latin typeface="Lato" pitchFamily="34" charset="0"/>
+                <a:ea typeface="Lato" pitchFamily="34" charset="-122"/>
+                <a:cs typeface="Lato" pitchFamily="34" charset="-120"/>
+              </a:rPr>
+              <a:t>summarise, chart and explain</a:t>
             </a:r>
             <a:endParaRPr lang="en-US" sz="5600" dirty="0"/>
           </a:p>
@@ -4288,15 +4305,15 @@
           <a:p>
             <a:pPr algn="l" indent="0" marL="0">
               <a:lnSpc>
-                <a:spcPts val="3600"/>
+                <a:spcPts val="3240"/>
               </a:lnSpc>
               <a:spcAft>
-                <a:spcPts val="2520"/>
+                <a:spcPts val="2020"/>
               </a:spcAft>
               <a:buNone/>
             </a:pPr>
             <a:r>
-              <a:rPr lang="en-US" sz="3000" dirty="0">
+              <a:rPr lang="en-US" sz="2700" dirty="0">
                 <a:solidFill>
                   <a:srgbClr val="111111"/>
                 </a:solidFill>
@@ -4304,9 +4321,101 @@
                 <a:ea typeface="Lato" pitchFamily="34" charset="-122"/>
                 <a:cs typeface="Lato" pitchFamily="34" charset="-120"/>
               </a:rPr>
-              <a:t>In DA12.ipynb use sunrise_sales.csv. 1) Report the number of rows and the total revenue. 2) Check for missing values and duplicates and report the counts. 3) Total the revenue by branch with names from a dictionary and sort the result.</a:t>
-            </a:r>
-            <a:endParaRPr lang="en-US" sz="3000" dirty="0"/>
+              <a:t>In DA12.ipynb use sunrise_sales.csv.</a:t>
+            </a:r>
+            <a:endParaRPr lang="en-US" sz="2700" dirty="0"/>
+          </a:p>
+          <a:p>
+            <a:pPr algn="l" indent="0" marL="0">
+              <a:lnSpc>
+                <a:spcPts val="3240"/>
+              </a:lnSpc>
+              <a:spcAft>
+                <a:spcPts val="2020"/>
+              </a:spcAft>
+              <a:buNone/>
+            </a:pPr>
+            <a:r>
+              <a:rPr lang="en-US" sz="2700" dirty="0">
+                <a:solidFill>
+                  <a:srgbClr val="111111"/>
+                </a:solidFill>
+                <a:latin typeface="Lato" pitchFamily="34" charset="0"/>
+                <a:ea typeface="Lato" pitchFamily="34" charset="-122"/>
+                <a:cs typeface="Lato" pitchFamily="34" charset="-120"/>
+              </a:rPr>
+              <a:t>1) Report the number of rows and the total revenue.</a:t>
+            </a:r>
+            <a:endParaRPr lang="en-US" sz="2700" dirty="0"/>
+          </a:p>
+          <a:p>
+            <a:pPr algn="l" indent="0" marL="0">
+              <a:lnSpc>
+                <a:spcPts val="3240"/>
+              </a:lnSpc>
+              <a:spcAft>
+                <a:spcPts val="2020"/>
+              </a:spcAft>
+              <a:buNone/>
+            </a:pPr>
+            <a:r>
+              <a:rPr lang="en-US" sz="2700" dirty="0">
+                <a:solidFill>
+                  <a:srgbClr val="111111"/>
+                </a:solidFill>
+                <a:latin typeface="Lato" pitchFamily="34" charset="0"/>
+                <a:ea typeface="Lato" pitchFamily="34" charset="-122"/>
+                <a:cs typeface="Lato" pitchFamily="34" charset="-120"/>
+              </a:rPr>
+              <a:t>2) Check for missing values and duplicates and report the counts.</a:t>
+            </a:r>
+            <a:endParaRPr lang="en-US" sz="2700" dirty="0"/>
+          </a:p>
+          <a:p>
+            <a:pPr algn="l" indent="0" marL="0">
+              <a:lnSpc>
+                <a:spcPts val="3240"/>
+              </a:lnSpc>
+              <a:spcAft>
+                <a:spcPts val="2020"/>
+              </a:spcAft>
+              <a:buNone/>
+            </a:pPr>
+            <a:r>
+              <a:rPr lang="en-US" sz="2700" dirty="0">
+                <a:solidFill>
+                  <a:srgbClr val="111111"/>
+                </a:solidFill>
+                <a:latin typeface="Lato" pitchFamily="34" charset="0"/>
+                <a:ea typeface="Lato" pitchFamily="34" charset="-122"/>
+                <a:cs typeface="Lato" pitchFamily="34" charset="-120"/>
+              </a:rPr>
+              <a:t>3) Total the revenue by branch with names from a dictionary and sort the result.</a:t>
+            </a:r>
+            <a:endParaRPr lang="en-US" sz="2700" dirty="0"/>
+          </a:p>
+          <a:p>
+            <a:pPr algn="l" indent="0" marL="0">
+              <a:lnSpc>
+                <a:spcPts val="3240"/>
+              </a:lnSpc>
+              <a:spcAft>
+                <a:spcPts val="2020"/>
+              </a:spcAft>
+              <a:buNone/>
+            </a:pPr>
+            <a:r>
+              <a:rPr lang="en-US" sz="2700" dirty="0">
+                <a:solidFill>
+                  <a:srgbClr val="111111"/>
+                </a:solidFill>
+                <a:latin typeface="Lato" pitchFamily="34" charset="0"/>
+                <a:ea typeface="Lato" pitchFamily="34" charset="-122"/>
+                <a:cs typeface="Lato" pitchFamily="34" charset="-120"/>
+              </a:rPr>
+              <a:t>4) Draw one labelled chart.</a:t>
+            </a:r>
+            <a:endParaRPr lang="en-US" sz="2700" dirty="0"/>
           </a:p>
         </p:txBody>
       </p:sp>
@@ -4471,15 +4580,15 @@
           <a:p>
             <a:pPr algn="l" indent="0" marL="0">
               <a:lnSpc>
-                <a:spcPts val="3480"/>
+                <a:spcPts val="3360"/>
               </a:lnSpc>
               <a:spcAft>
-                <a:spcPts val="2520"/>
+                <a:spcPts val="2020"/>
               </a:spcAft>
               <a:buNone/>
             </a:pPr>
             <a:r>
-              <a:rPr lang="en-US" sz="2900" dirty="0">
+              <a:rPr lang="en-US" sz="2800" dirty="0">
                 <a:solidFill>
                   <a:srgbClr val="111111"/>
                 </a:solidFill>
@@ -4487,22 +4596,22 @@
                 <a:ea typeface="Lato" pitchFamily="34" charset="-122"/>
                 <a:cs typeface="Lato" pitchFamily="34" charset="-120"/>
               </a:rPr>
-              <a:t>4) Draw one labelled chart. 5) Write two findings and one limitation in text cells. Restart the kernel, run all cells from the top, save and submit DA12.ipynb with a short report.pdf or report.docx through the route in START_HERE.md.</a:t>
-            </a:r>
-            <a:endParaRPr lang="en-US" sz="2900" dirty="0"/>
+              <a:t>5) Write two findings and one limitation in text cells.</a:t>
+            </a:r>
+            <a:endParaRPr lang="en-US" sz="2800" dirty="0"/>
           </a:p>
           <a:p>
             <a:pPr algn="l" indent="0" marL="0">
               <a:lnSpc>
-                <a:spcPts val="3480"/>
+                <a:spcPts val="3360"/>
               </a:lnSpc>
               <a:spcAft>
-                <a:spcPts val="2520"/>
+                <a:spcPts val="2020"/>
               </a:spcAft>
               <a:buNone/>
             </a:pPr>
             <a:r>
-              <a:rPr lang="en-US" sz="2900" dirty="0">
+              <a:rPr lang="en-US" sz="2800" dirty="0">
                 <a:solidFill>
                   <a:srgbClr val="111111"/>
                 </a:solidFill>
@@ -4510,9 +4619,32 @@
                 <a:ea typeface="Lato" pitchFamily="34" charset="-122"/>
                 <a:cs typeface="Lato" pitchFamily="34" charset="-120"/>
               </a:rPr>
-              <a:t>Save it as DA12. Write two sentences: what you changed and how you checked it.</a:t>
-            </a:r>
-            <a:endParaRPr lang="en-US" sz="2900" dirty="0"/>
+              <a:t>Restart the kernel, run all cells from the top, save and submit DA12.ipynb with a short report.pdf or report.docx through the route in START_HERE.md.</a:t>
+            </a:r>
+            <a:endParaRPr lang="en-US" sz="2800" dirty="0"/>
+          </a:p>
+          <a:p>
+            <a:pPr algn="l" indent="0" marL="0">
+              <a:lnSpc>
+                <a:spcPts val="3360"/>
+              </a:lnSpc>
+              <a:spcAft>
+                <a:spcPts val="2020"/>
+              </a:spcAft>
+              <a:buNone/>
+            </a:pPr>
+            <a:r>
+              <a:rPr lang="en-US" sz="2800" dirty="0">
+                <a:solidFill>
+                  <a:srgbClr val="111111"/>
+                </a:solidFill>
+                <a:latin typeface="Lato" pitchFamily="34" charset="0"/>
+                <a:ea typeface="Lato" pitchFamily="34" charset="-122"/>
+                <a:cs typeface="Lato" pitchFamily="34" charset="-120"/>
+              </a:rPr>
+              <a:t>Write two sentences: what you changed and how you checked it.</a:t>
+            </a:r>
+            <a:endParaRPr lang="en-US" sz="2800" dirty="0"/>
           </a:p>
         </p:txBody>
       </p:sp>
